--- a/roAp/Dan Meeting.pptx
+++ b/roAp/Dan Meeting.pptx
@@ -2979,7 +2979,7 @@
         </p:blipFill>
         <p:spPr>
           <a:xfrm>
-            <a:off x="540385" y="342900"/>
+            <a:off x="540385" y="352425"/>
             <a:ext cx="11110595" cy="6172200"/>
           </a:xfrm>
           <a:prstGeom prst="rect">
